--- a/docs/customer-documents/orgcomp-series/federal-orgcomp-conmon-gap-roadmap.pptx
+++ b/docs/customer-documents/orgcomp-series/federal-orgcomp-conmon-gap-roadmap.pptx
@@ -511,7 +511,7 @@
           <a:p>
             <a:r>
               <a:rPr lang="en-US" dirty="0"/>
-              <a:t>Framing: this is the briefing companion to the Federal AAN / ConMon Compliance Gap Roadmap — the series' single source of truth for federal dates, scoped to FedRAMP Moderate throughout. The headline: the series is complete and the authorization package is ready for FedRAMP PMO submission. All nineteen parts are delivered as of July 5, 2026; the evaluation engine (ADR-111) is wired for all 29 FedRAMP 20x CR26 KSI rules with zero scaffold rules remaining; the OSCAL AP+AR+POA&amp;M bundle generates via &lt;engine&gt; oscal bundle with 29/29 KSIs satisfied, zero open risks, and zero POA&amp;M items. The two working layers: the AAN series (Parts 1-19) provides the complete evidence and authorization layer for FedRAMP 20x continuous monitoring, and the Conformance Adapter / OSCAL Emitter framework provides the evidence governance layer — tracking which evidence closes which control, generating machine-readable KSI packages, and feeding the automated ConMon gate. Caveat to voice: internal working artifact, not an authorization package; claims advisory pending formal ATO review. Date Code identifies this version; newest code wins.
+              <a:t>Framing: this is the briefing companion to the Federal OrgComp / ConMon Compliance Gap Roadmap — the series' single source of truth for federal dates, scoped to FedRAMP Moderate throughout. The headline: the series is complete and the authorization package is ready for FedRAMP PMO submission. All nineteen parts are delivered as of July 5, 2026; the evaluation engine (ADR-111) is wired for all 29 FedRAMP 20x CR26 KSI rules with zero scaffold rules remaining; the OSCAL AP+AR+POA&amp;M bundle generates via &lt;engine&gt; oscal bundle with 29/29 KSIs satisfied, zero open risks, and zero POA&amp;M items. The two working layers: the OrgComp series (Parts 1-19) provides the complete evidence and authorization layer for FedRAMP 20x continuous monitoring, and the Conformance Adapter / OSCAL Emitter framework provides the evidence governance layer — tracking which evidence closes which control, generating machine-readable KSI packages, and feeding the automated ConMon gate. Caveat to voice: internal working artifact, not an authorization package; claims advisory pending formal ATO review. Date Code identifies this version; newest code wins.
 Vendor sources: https://www.fedramp.gov/20x/ | host repo: docs/customer-documents/federal-aan-series/federal-aan-conmon-gap-roadmap.md</a:t>
             </a:r>
             <a:endParaRPr lang="en-US" dirty="0"/>
@@ -1719,7 +1719,7 @@
                 <a:ea typeface="Arial" pitchFamily="34" charset="-122"/>
                 <a:cs typeface="Arial" pitchFamily="34" charset="-120"/>
               </a:rPr>
-              <a:t>FEDERAL AAN SERIES • ROADMAP BRIEFING • FEDRAMP MODERATE</a:t>
+              <a:t>FEDERAL ORGCOMP SERIES • ROADMAP BRIEFING • FEDRAMP MODERATE</a:t>
             </a:r>
             <a:endParaRPr lang="en-US" sz="1150" dirty="0"/>
           </a:p>
@@ -1797,7 +1797,7 @@
                 <a:ea typeface="Arial" pitchFamily="34" charset="-122"/>
                 <a:cs typeface="Arial" pitchFamily="34" charset="-120"/>
               </a:rPr>
-              <a:t>Federal AAN / ConMon Compliance Gap Roadmap — Series Status, the Full Federal Timeline, and the Path to FedRAMP PMO Submission</a:t>
+              <a:t>Federal OrgComp / ConMon Compliance Gap Roadmap — Series Status, the Full Federal Timeline, and the Path to FedRAMP PMO Submission</a:t>
             </a:r>
             <a:endParaRPr lang="en-US" sz="1550" dirty="0"/>
           </a:p>
@@ -2104,7 +2104,7 @@
                 <a:ea typeface="Arial" pitchFamily="34" charset="-122"/>
                 <a:cs typeface="Arial" pitchFamily="34" charset="-120"/>
               </a:rPr>
-              <a:t>Date Code: 2026-07-07 15:28 ET</a:t>
+              <a:t>Date Code: 2026-07-27 09:38 ET</a:t>
             </a:r>
             <a:endParaRPr lang="en-US" sz="1000" dirty="0"/>
           </a:p>
@@ -2323,7 +2323,7 @@
                 <a:ea typeface="Arial" pitchFamily="34" charset="-122"/>
                 <a:cs typeface="Arial" pitchFamily="34" charset="-120"/>
               </a:rPr>
-              <a:t>Federal AAN — ConMon Gap Roadmap · CSI Team Draft — Internal · FedRAMP Moderate · Date Code 2026-07-07 15:28 ET</a:t>
+              <a:t>Federal OrgComp — ConMon Gap Roadmap · CSI Team Draft — Internal · FedRAMP Moderate · Date Code 2026-07-27 09:38 ET</a:t>
             </a:r>
             <a:endParaRPr lang="en-US" sz="800" dirty="0"/>
           </a:p>
@@ -3205,7 +3205,7 @@
                 <a:ea typeface="Arial" pitchFamily="34" charset="-122"/>
                 <a:cs typeface="Arial" pitchFamily="34" charset="-120"/>
               </a:rPr>
-              <a:t>Federal AAN — ConMon Gap Roadmap · CSI Team Draft — Internal · FedRAMP Moderate · Date Code 2026-07-07 15:28 ET</a:t>
+              <a:t>Federal OrgComp — ConMon Gap Roadmap · CSI Team Draft — Internal · FedRAMP Moderate · Date Code 2026-07-27 09:38 ET</a:t>
             </a:r>
             <a:endParaRPr lang="en-US" sz="800" dirty="0"/>
           </a:p>
@@ -4236,7 +4236,7 @@
                 <a:ea typeface="Arial" pitchFamily="34" charset="-122"/>
                 <a:cs typeface="Arial" pitchFamily="34" charset="-120"/>
               </a:rPr>
-              <a:t>Federal AAN — ConMon Gap Roadmap · CSI Team Draft — Internal · FedRAMP Moderate · Date Code 2026-07-07 15:28 ET</a:t>
+              <a:t>Federal OrgComp — ConMon Gap Roadmap · CSI Team Draft — Internal · FedRAMP Moderate · Date Code 2026-07-27 09:38 ET</a:t>
             </a:r>
             <a:endParaRPr lang="en-US" sz="800" dirty="0"/>
           </a:p>
@@ -5267,7 +5267,7 @@
                 <a:ea typeface="Arial" pitchFamily="34" charset="-122"/>
                 <a:cs typeface="Arial" pitchFamily="34" charset="-120"/>
               </a:rPr>
-              <a:t>Federal AAN — ConMon Gap Roadmap · CSI Team Draft — Internal · FedRAMP Moderate · Date Code 2026-07-07 15:28 ET</a:t>
+              <a:t>Federal OrgComp — ConMon Gap Roadmap · CSI Team Draft — Internal · FedRAMP Moderate · Date Code 2026-07-27 09:38 ET</a:t>
             </a:r>
             <a:endParaRPr lang="en-US" sz="800" dirty="0"/>
           </a:p>
@@ -6298,7 +6298,7 @@
                 <a:ea typeface="Arial" pitchFamily="34" charset="-122"/>
                 <a:cs typeface="Arial" pitchFamily="34" charset="-120"/>
               </a:rPr>
-              <a:t>Federal AAN — ConMon Gap Roadmap · CSI Team Draft — Internal · FedRAMP Moderate · Date Code 2026-07-07 15:28 ET</a:t>
+              <a:t>Federal OrgComp — ConMon Gap Roadmap · CSI Team Draft — Internal · FedRAMP Moderate · Date Code 2026-07-27 09:38 ET</a:t>
             </a:r>
             <a:endParaRPr lang="en-US" sz="800" dirty="0"/>
           </a:p>
@@ -7033,7 +7033,7 @@
                 <a:ea typeface="Arial" pitchFamily="34" charset="-122"/>
                 <a:cs typeface="Arial" pitchFamily="34" charset="-120"/>
               </a:rPr>
-              <a:t>Federal AAN — ConMon Gap Roadmap · CSI Team Draft — Internal · FedRAMP Moderate · Date Code 2026-07-07 15:28 ET</a:t>
+              <a:t>Federal OrgComp — ConMon Gap Roadmap · CSI Team Draft — Internal · FedRAMP Moderate · Date Code 2026-07-27 09:38 ET</a:t>
             </a:r>
             <a:endParaRPr lang="en-US" sz="800" dirty="0"/>
           </a:p>
@@ -9343,7 +9343,7 @@
                 <a:ea typeface="Arial" pitchFamily="34" charset="-122"/>
                 <a:cs typeface="Arial" pitchFamily="34" charset="-120"/>
               </a:rPr>
-              <a:t>Federal AAN — ConMon Gap Roadmap · CSI Team Draft — Internal · FedRAMP Moderate · Date Code 2026-07-07 15:28 ET</a:t>
+              <a:t>Federal OrgComp — ConMon Gap Roadmap · CSI Team Draft — Internal · FedRAMP Moderate · Date Code 2026-07-27 09:38 ET</a:t>
             </a:r>
             <a:endParaRPr lang="en-US" sz="800" dirty="0"/>
           </a:p>
@@ -11088,7 +11088,7 @@
                 <a:ea typeface="Arial" pitchFamily="34" charset="-122"/>
                 <a:cs typeface="Arial" pitchFamily="34" charset="-120"/>
               </a:rPr>
-              <a:t>Federal AAN — ConMon Gap Roadmap · CSI Team Draft — Internal · FedRAMP Moderate · Date Code 2026-07-07 15:28 ET</a:t>
+              <a:t>Federal OrgComp — ConMon Gap Roadmap · CSI Team Draft — Internal · FedRAMP Moderate · Date Code 2026-07-27 09:38 ET</a:t>
             </a:r>
             <a:endParaRPr lang="en-US" sz="800" dirty="0"/>
           </a:p>
@@ -11793,7 +11793,7 @@
                 <a:ea typeface="Arial" pitchFamily="34" charset="-122"/>
                 <a:cs typeface="Arial" pitchFamily="34" charset="-120"/>
               </a:rPr>
-              <a:t>Federal AAN — ConMon Gap Roadmap · CSI Team Draft — Internal · FedRAMP Moderate · Date Code 2026-07-07 15:28 ET</a:t>
+              <a:t>Federal OrgComp — ConMon Gap Roadmap · CSI Team Draft — Internal · FedRAMP Moderate · Date Code 2026-07-27 09:38 ET</a:t>
             </a:r>
             <a:endParaRPr lang="en-US" sz="800" dirty="0"/>
           </a:p>

--- a/docs/customer-documents/orgcomp-series/federal-orgcomp-conmon-gap-roadmap.pptx
+++ b/docs/customer-documents/orgcomp-series/federal-orgcomp-conmon-gap-roadmap.pptx
@@ -2104,7 +2104,7 @@
                 <a:ea typeface="Arial" pitchFamily="34" charset="-122"/>
                 <a:cs typeface="Arial" pitchFamily="34" charset="-120"/>
               </a:rPr>
-              <a:t>Date Code: 2026-07-27 09:38 ET</a:t>
+              <a:t>Date Code: 2026-07-27 10:06 ET</a:t>
             </a:r>
             <a:endParaRPr lang="en-US" sz="1000" dirty="0"/>
           </a:p>
@@ -2323,7 +2323,7 @@
                 <a:ea typeface="Arial" pitchFamily="34" charset="-122"/>
                 <a:cs typeface="Arial" pitchFamily="34" charset="-120"/>
               </a:rPr>
-              <a:t>Federal OrgComp — ConMon Gap Roadmap · CSI Team Draft — Internal · FedRAMP Moderate · Date Code 2026-07-27 09:38 ET</a:t>
+              <a:t>Federal OrgComp — ConMon Gap Roadmap · CSI Team Draft — Internal · FedRAMP Moderate · Date Code 2026-07-27 10:06 ET</a:t>
             </a:r>
             <a:endParaRPr lang="en-US" sz="800" dirty="0"/>
           </a:p>
@@ -3205,7 +3205,7 @@
                 <a:ea typeface="Arial" pitchFamily="34" charset="-122"/>
                 <a:cs typeface="Arial" pitchFamily="34" charset="-120"/>
               </a:rPr>
-              <a:t>Federal OrgComp — ConMon Gap Roadmap · CSI Team Draft — Internal · FedRAMP Moderate · Date Code 2026-07-27 09:38 ET</a:t>
+              <a:t>Federal OrgComp — ConMon Gap Roadmap · CSI Team Draft — Internal · FedRAMP Moderate · Date Code 2026-07-27 10:06 ET</a:t>
             </a:r>
             <a:endParaRPr lang="en-US" sz="800" dirty="0"/>
           </a:p>
@@ -4236,7 +4236,7 @@
                 <a:ea typeface="Arial" pitchFamily="34" charset="-122"/>
                 <a:cs typeface="Arial" pitchFamily="34" charset="-120"/>
               </a:rPr>
-              <a:t>Federal OrgComp — ConMon Gap Roadmap · CSI Team Draft — Internal · FedRAMP Moderate · Date Code 2026-07-27 09:38 ET</a:t>
+              <a:t>Federal OrgComp — ConMon Gap Roadmap · CSI Team Draft — Internal · FedRAMP Moderate · Date Code 2026-07-27 10:06 ET</a:t>
             </a:r>
             <a:endParaRPr lang="en-US" sz="800" dirty="0"/>
           </a:p>
@@ -5267,7 +5267,7 @@
                 <a:ea typeface="Arial" pitchFamily="34" charset="-122"/>
                 <a:cs typeface="Arial" pitchFamily="34" charset="-120"/>
               </a:rPr>
-              <a:t>Federal OrgComp — ConMon Gap Roadmap · CSI Team Draft — Internal · FedRAMP Moderate · Date Code 2026-07-27 09:38 ET</a:t>
+              <a:t>Federal OrgComp — ConMon Gap Roadmap · CSI Team Draft — Internal · FedRAMP Moderate · Date Code 2026-07-27 10:06 ET</a:t>
             </a:r>
             <a:endParaRPr lang="en-US" sz="800" dirty="0"/>
           </a:p>
@@ -6298,7 +6298,7 @@
                 <a:ea typeface="Arial" pitchFamily="34" charset="-122"/>
                 <a:cs typeface="Arial" pitchFamily="34" charset="-120"/>
               </a:rPr>
-              <a:t>Federal OrgComp — ConMon Gap Roadmap · CSI Team Draft — Internal · FedRAMP Moderate · Date Code 2026-07-27 09:38 ET</a:t>
+              <a:t>Federal OrgComp — ConMon Gap Roadmap · CSI Team Draft — Internal · FedRAMP Moderate · Date Code 2026-07-27 10:06 ET</a:t>
             </a:r>
             <a:endParaRPr lang="en-US" sz="800" dirty="0"/>
           </a:p>
@@ -7033,7 +7033,7 @@
                 <a:ea typeface="Arial" pitchFamily="34" charset="-122"/>
                 <a:cs typeface="Arial" pitchFamily="34" charset="-120"/>
               </a:rPr>
-              <a:t>Federal OrgComp — ConMon Gap Roadmap · CSI Team Draft — Internal · FedRAMP Moderate · Date Code 2026-07-27 09:38 ET</a:t>
+              <a:t>Federal OrgComp — ConMon Gap Roadmap · CSI Team Draft — Internal · FedRAMP Moderate · Date Code 2026-07-27 10:06 ET</a:t>
             </a:r>
             <a:endParaRPr lang="en-US" sz="800" dirty="0"/>
           </a:p>
@@ -9343,7 +9343,7 @@
                 <a:ea typeface="Arial" pitchFamily="34" charset="-122"/>
                 <a:cs typeface="Arial" pitchFamily="34" charset="-120"/>
               </a:rPr>
-              <a:t>Federal OrgComp — ConMon Gap Roadmap · CSI Team Draft — Internal · FedRAMP Moderate · Date Code 2026-07-27 09:38 ET</a:t>
+              <a:t>Federal OrgComp — ConMon Gap Roadmap · CSI Team Draft — Internal · FedRAMP Moderate · Date Code 2026-07-27 10:06 ET</a:t>
             </a:r>
             <a:endParaRPr lang="en-US" sz="800" dirty="0"/>
           </a:p>
@@ -11088,7 +11088,7 @@
                 <a:ea typeface="Arial" pitchFamily="34" charset="-122"/>
                 <a:cs typeface="Arial" pitchFamily="34" charset="-120"/>
               </a:rPr>
-              <a:t>Federal OrgComp — ConMon Gap Roadmap · CSI Team Draft — Internal · FedRAMP Moderate · Date Code 2026-07-27 09:38 ET</a:t>
+              <a:t>Federal OrgComp — ConMon Gap Roadmap · CSI Team Draft — Internal · FedRAMP Moderate · Date Code 2026-07-27 10:06 ET</a:t>
             </a:r>
             <a:endParaRPr lang="en-US" sz="800" dirty="0"/>
           </a:p>
@@ -11793,7 +11793,7 @@
                 <a:ea typeface="Arial" pitchFamily="34" charset="-122"/>
                 <a:cs typeface="Arial" pitchFamily="34" charset="-120"/>
               </a:rPr>
-              <a:t>Federal OrgComp — ConMon Gap Roadmap · CSI Team Draft — Internal · FedRAMP Moderate · Date Code 2026-07-27 09:38 ET</a:t>
+              <a:t>Federal OrgComp — ConMon Gap Roadmap · CSI Team Draft — Internal · FedRAMP Moderate · Date Code 2026-07-27 10:06 ET</a:t>
             </a:r>
             <a:endParaRPr lang="en-US" sz="800" dirty="0"/>
           </a:p>

--- a/docs/customer-documents/orgcomp-series/federal-orgcomp-conmon-gap-roadmap.pptx
+++ b/docs/customer-documents/orgcomp-series/federal-orgcomp-conmon-gap-roadmap.pptx
@@ -511,7 +511,7 @@
           <a:p>
             <a:r>
               <a:rPr lang="en-US" dirty="0"/>
-              <a:t>Framing: this is the briefing companion to the Federal AAN / ConMon Compliance Gap Roadmap — the series' single source of truth for federal dates, scoped to FedRAMP Moderate throughout. The headline: the series is complete and the authorization package is ready for FedRAMP PMO submission. All nineteen parts are delivered as of July 5, 2026; the evaluation engine (ADR-111) is wired for all 29 FedRAMP 20x CR26 KSI rules with zero scaffold rules remaining; the OSCAL AP+AR+POA&amp;M bundle generates via &lt;engine&gt; oscal bundle with 29/29 KSIs satisfied, zero open risks, and zero POA&amp;M items. The two working layers: the AAN series (Parts 1-19) provides the complete evidence and authorization layer for FedRAMP 20x continuous monitoring, and the Conformance Adapter / OSCAL Emitter framework provides the evidence governance layer — tracking which evidence closes which control, generating machine-readable KSI packages, and feeding the automated ConMon gate. Caveat to voice: internal working artifact, not an authorization package; claims advisory pending formal ATO review. Date Code identifies this version; newest code wins.
+              <a:t>Framing: this is the briefing companion to the Federal OrgComp / ConMon Compliance Gap Roadmap — the series' single source of truth for federal dates, scoped to FedRAMP Moderate throughout. The headline: the series is complete and the authorization package is ready for FedRAMP PMO submission. All nineteen parts are delivered as of July 5, 2026; the evaluation engine (ADR-111) is wired for all 29 FedRAMP 20x CR26 KSI rules with zero scaffold rules remaining; the OSCAL AP+AR+POA&amp;M bundle generates via &lt;engine&gt; oscal bundle with 29/29 KSIs satisfied, zero open risks, and zero POA&amp;M items. The two working layers: the OrgComp series (Parts 1-19) provides the complete evidence and authorization layer for FedRAMP 20x continuous monitoring, and the Conformance Adapter / OSCAL Emitter framework provides the evidence governance layer — tracking which evidence closes which control, generating machine-readable KSI packages, and feeding the automated ConMon gate. Caveat to voice: internal working artifact, not an authorization package; claims advisory pending formal ATO review. Date Code identifies this version; newest code wins.
 Vendor sources: https://www.fedramp.gov/20x/ | host repo: docs/customer-documents/federal-aan-series/federal-aan-conmon-gap-roadmap.md</a:t>
             </a:r>
             <a:endParaRPr lang="en-US" dirty="0"/>
@@ -1719,7 +1719,7 @@
                 <a:ea typeface="Arial" pitchFamily="34" charset="-122"/>
                 <a:cs typeface="Arial" pitchFamily="34" charset="-120"/>
               </a:rPr>
-              <a:t>FEDERAL AAN SERIES • ROADMAP BRIEFING • FEDRAMP MODERATE</a:t>
+              <a:t>FEDERAL ORGCOMP SERIES • ROADMAP BRIEFING • FEDRAMP MODERATE</a:t>
             </a:r>
             <a:endParaRPr lang="en-US" sz="1150" dirty="0"/>
           </a:p>
@@ -1797,7 +1797,7 @@
                 <a:ea typeface="Arial" pitchFamily="34" charset="-122"/>
                 <a:cs typeface="Arial" pitchFamily="34" charset="-120"/>
               </a:rPr>
-              <a:t>Federal AAN / ConMon Compliance Gap Roadmap — Series Status, the Full Federal Timeline, and the Path to FedRAMP PMO Submission</a:t>
+              <a:t>Federal OrgComp / ConMon Compliance Gap Roadmap — Series Status, the Full Federal Timeline, and the Path to FedRAMP PMO Submission</a:t>
             </a:r>
             <a:endParaRPr lang="en-US" sz="1550" dirty="0"/>
           </a:p>
@@ -2104,7 +2104,7 @@
                 <a:ea typeface="Arial" pitchFamily="34" charset="-122"/>
                 <a:cs typeface="Arial" pitchFamily="34" charset="-120"/>
               </a:rPr>
-              <a:t>Date Code: 2026-07-07 15:28 ET</a:t>
+              <a:t>Date Code: 2026-07-27 10:06 ET</a:t>
             </a:r>
             <a:endParaRPr lang="en-US" sz="1000" dirty="0"/>
           </a:p>
@@ -2323,7 +2323,7 @@
                 <a:ea typeface="Arial" pitchFamily="34" charset="-122"/>
                 <a:cs typeface="Arial" pitchFamily="34" charset="-120"/>
               </a:rPr>
-              <a:t>Federal AAN — ConMon Gap Roadmap · CSI Team Draft — Internal · FedRAMP Moderate · Date Code 2026-07-07 15:28 ET</a:t>
+              <a:t>Federal OrgComp — ConMon Gap Roadmap · CSI Team Draft — Internal · FedRAMP Moderate · Date Code 2026-07-27 10:06 ET</a:t>
             </a:r>
             <a:endParaRPr lang="en-US" sz="800" dirty="0"/>
           </a:p>
@@ -3205,7 +3205,7 @@
                 <a:ea typeface="Arial" pitchFamily="34" charset="-122"/>
                 <a:cs typeface="Arial" pitchFamily="34" charset="-120"/>
               </a:rPr>
-              <a:t>Federal AAN — ConMon Gap Roadmap · CSI Team Draft — Internal · FedRAMP Moderate · Date Code 2026-07-07 15:28 ET</a:t>
+              <a:t>Federal OrgComp — ConMon Gap Roadmap · CSI Team Draft — Internal · FedRAMP Moderate · Date Code 2026-07-27 10:06 ET</a:t>
             </a:r>
             <a:endParaRPr lang="en-US" sz="800" dirty="0"/>
           </a:p>
@@ -4236,7 +4236,7 @@
                 <a:ea typeface="Arial" pitchFamily="34" charset="-122"/>
                 <a:cs typeface="Arial" pitchFamily="34" charset="-120"/>
               </a:rPr>
-              <a:t>Federal AAN — ConMon Gap Roadmap · CSI Team Draft — Internal · FedRAMP Moderate · Date Code 2026-07-07 15:28 ET</a:t>
+              <a:t>Federal OrgComp — ConMon Gap Roadmap · CSI Team Draft — Internal · FedRAMP Moderate · Date Code 2026-07-27 10:06 ET</a:t>
             </a:r>
             <a:endParaRPr lang="en-US" sz="800" dirty="0"/>
           </a:p>
@@ -5267,7 +5267,7 @@
                 <a:ea typeface="Arial" pitchFamily="34" charset="-122"/>
                 <a:cs typeface="Arial" pitchFamily="34" charset="-120"/>
               </a:rPr>
-              <a:t>Federal AAN — ConMon Gap Roadmap · CSI Team Draft — Internal · FedRAMP Moderate · Date Code 2026-07-07 15:28 ET</a:t>
+              <a:t>Federal OrgComp — ConMon Gap Roadmap · CSI Team Draft — Internal · FedRAMP Moderate · Date Code 2026-07-27 10:06 ET</a:t>
             </a:r>
             <a:endParaRPr lang="en-US" sz="800" dirty="0"/>
           </a:p>
@@ -6298,7 +6298,7 @@
                 <a:ea typeface="Arial" pitchFamily="34" charset="-122"/>
                 <a:cs typeface="Arial" pitchFamily="34" charset="-120"/>
               </a:rPr>
-              <a:t>Federal AAN — ConMon Gap Roadmap · CSI Team Draft — Internal · FedRAMP Moderate · Date Code 2026-07-07 15:28 ET</a:t>
+              <a:t>Federal OrgComp — ConMon Gap Roadmap · CSI Team Draft — Internal · FedRAMP Moderate · Date Code 2026-07-27 10:06 ET</a:t>
             </a:r>
             <a:endParaRPr lang="en-US" sz="800" dirty="0"/>
           </a:p>
@@ -7033,7 +7033,7 @@
                 <a:ea typeface="Arial" pitchFamily="34" charset="-122"/>
                 <a:cs typeface="Arial" pitchFamily="34" charset="-120"/>
               </a:rPr>
-              <a:t>Federal AAN — ConMon Gap Roadmap · CSI Team Draft — Internal · FedRAMP Moderate · Date Code 2026-07-07 15:28 ET</a:t>
+              <a:t>Federal OrgComp — ConMon Gap Roadmap · CSI Team Draft — Internal · FedRAMP Moderate · Date Code 2026-07-27 10:06 ET</a:t>
             </a:r>
             <a:endParaRPr lang="en-US" sz="800" dirty="0"/>
           </a:p>
@@ -9343,7 +9343,7 @@
                 <a:ea typeface="Arial" pitchFamily="34" charset="-122"/>
                 <a:cs typeface="Arial" pitchFamily="34" charset="-120"/>
               </a:rPr>
-              <a:t>Federal AAN — ConMon Gap Roadmap · CSI Team Draft — Internal · FedRAMP Moderate · Date Code 2026-07-07 15:28 ET</a:t>
+              <a:t>Federal OrgComp — ConMon Gap Roadmap · CSI Team Draft — Internal · FedRAMP Moderate · Date Code 2026-07-27 10:06 ET</a:t>
             </a:r>
             <a:endParaRPr lang="en-US" sz="800" dirty="0"/>
           </a:p>
@@ -11088,7 +11088,7 @@
                 <a:ea typeface="Arial" pitchFamily="34" charset="-122"/>
                 <a:cs typeface="Arial" pitchFamily="34" charset="-120"/>
               </a:rPr>
-              <a:t>Federal AAN — ConMon Gap Roadmap · CSI Team Draft — Internal · FedRAMP Moderate · Date Code 2026-07-07 15:28 ET</a:t>
+              <a:t>Federal OrgComp — ConMon Gap Roadmap · CSI Team Draft — Internal · FedRAMP Moderate · Date Code 2026-07-27 10:06 ET</a:t>
             </a:r>
             <a:endParaRPr lang="en-US" sz="800" dirty="0"/>
           </a:p>
@@ -11793,7 +11793,7 @@
                 <a:ea typeface="Arial" pitchFamily="34" charset="-122"/>
                 <a:cs typeface="Arial" pitchFamily="34" charset="-120"/>
               </a:rPr>
-              <a:t>Federal AAN — ConMon Gap Roadmap · CSI Team Draft — Internal · FedRAMP Moderate · Date Code 2026-07-07 15:28 ET</a:t>
+              <a:t>Federal OrgComp — ConMon Gap Roadmap · CSI Team Draft — Internal · FedRAMP Moderate · Date Code 2026-07-27 10:06 ET</a:t>
             </a:r>
             <a:endParaRPr lang="en-US" sz="800" dirty="0"/>
           </a:p>
